--- a/docs/vllm_xtu_moe项目报告.pptx
+++ b/docs/vllm_xtu_moe项目报告.pptx
@@ -11502,73 +11502,55 @@
         <p:spPr>
           <a:xfrm>
             <a:off x="1097280" y="3154680"/>
-            <a:ext cx="2743200" cy="594360"/>
-          </a:xfrm>
-          <a:prstGeom prst="rect">
-            <a:avLst/>
-          </a:prstGeom>
-          <a:noFill/>
-        </p:spPr>
-        <p:txBody>
-          <a:bodyPr wrap="square" lIns="36576" tIns="18288" rIns="36576" bIns="18288" anchor="t">
-            <a:spAutoFit/>
-          </a:bodyPr>
-          <a:lstStyle/>
-          <a:p>
-            <a:pPr algn="l"/>
-            <a:r>
-              <a:rPr sz="1200" b="0" dirty="0">
+            <a:ext cx="2743200" cy="590931"/>
+          </a:xfrm>
+          <a:prstGeom prst="rect">
+            <a:avLst/>
+          </a:prstGeom>
+          <a:noFill/>
+        </p:spPr>
+        <p:txBody>
+          <a:bodyPr wrap="square" lIns="36576" tIns="18288" rIns="36576" bIns="18288" anchor="t">
+            <a:spAutoFit/>
+          </a:bodyPr>
+          <a:lstStyle/>
+          <a:p>
+            <a:pPr algn="l"/>
+            <a:r>
+              <a:rPr lang="en-US" sz="1200" dirty="0" err="1">
                 <a:solidFill>
                   <a:srgbClr val="9DADB9"/>
                 </a:solidFill>
                 <a:latin typeface="Microsoft YaHei"/>
               </a:rPr>
-              <a:t>CPU </a:t>
-            </a:r>
-            <a:r>
-              <a:rPr sz="1200" b="0" dirty="0" err="1">
+              <a:t>性能优化</a:t>
+            </a:r>
+            <a:endParaRPr lang="en-US" sz="1200" dirty="0">
+              <a:solidFill>
+                <a:srgbClr val="9DADB9"/>
+              </a:solidFill>
+              <a:latin typeface="Microsoft YaHei"/>
+            </a:endParaRPr>
+          </a:p>
+          <a:p>
+            <a:pPr algn="l"/>
+            <a:endParaRPr lang="en-US" sz="1200" b="0" dirty="0">
+              <a:solidFill>
+                <a:srgbClr val="9DADB9"/>
+              </a:solidFill>
+              <a:latin typeface="Microsoft YaHei"/>
+            </a:endParaRPr>
+          </a:p>
+          <a:p>
+            <a:pPr algn="l"/>
+            <a:r>
+              <a:rPr lang="en-US" sz="1200" dirty="0" err="1">
                 <a:solidFill>
                   <a:srgbClr val="9DADB9"/>
                 </a:solidFill>
                 <a:latin typeface="Microsoft YaHei"/>
               </a:rPr>
-              <a:t>每层</a:t>
-            </a:r>
-            <a:r>
-              <a:rPr sz="1200" b="0" dirty="0">
-                <a:solidFill>
-                  <a:srgbClr val="9DADB9"/>
-                </a:solidFill>
-                <a:latin typeface="Microsoft YaHei"/>
-              </a:rPr>
-              <a:t> 0.19 </a:t>
-            </a:r>
-            <a:r>
-              <a:rPr sz="1200" b="0" dirty="0" err="1">
-                <a:solidFill>
-                  <a:srgbClr val="9DADB9"/>
-                </a:solidFill>
-                <a:latin typeface="Microsoft YaHei"/>
-              </a:rPr>
-              <a:t>ms；常驻层</a:t>
-            </a:r>
-            <a:r>
-              <a:rPr sz="1200" b="0" dirty="0">
-                <a:solidFill>
-                  <a:srgbClr val="9DADB9"/>
-                </a:solidFill>
-                <a:latin typeface="Microsoft YaHei"/>
-              </a:rPr>
-              <a:t> 14+；C=1 </a:t>
-            </a:r>
-            <a:r>
-              <a:rPr sz="1200" b="0" dirty="0" err="1">
-                <a:solidFill>
-                  <a:srgbClr val="9DADB9"/>
-                </a:solidFill>
-                <a:latin typeface="Microsoft YaHei"/>
-              </a:rPr>
-              <a:t>追平专有引擎</a:t>
+              <a:t>支持更多开源模型</a:t>
             </a:r>
             <a:endParaRPr sz="1200" b="0" dirty="0">
               <a:solidFill>
@@ -11704,66 +11686,30 @@
         <p:spPr>
           <a:xfrm>
             <a:off x="4800600" y="3154680"/>
-            <a:ext cx="2743200" cy="775597"/>
-          </a:xfrm>
-          <a:prstGeom prst="rect">
-            <a:avLst/>
-          </a:prstGeom>
-          <a:noFill/>
-        </p:spPr>
-        <p:txBody>
-          <a:bodyPr wrap="square" lIns="36576" tIns="18288" rIns="36576" bIns="18288" anchor="t">
-            <a:spAutoFit/>
-          </a:bodyPr>
-          <a:lstStyle/>
-          <a:p>
-            <a:pPr algn="l"/>
-            <a:r>
-              <a:rPr sz="1200" b="0" dirty="0" err="1">
+            <a:ext cx="2743200" cy="590931"/>
+          </a:xfrm>
+          <a:prstGeom prst="rect">
+            <a:avLst/>
+          </a:prstGeom>
+          <a:noFill/>
+        </p:spPr>
+        <p:txBody>
+          <a:bodyPr wrap="square" lIns="36576" tIns="18288" rIns="36576" bIns="18288" anchor="t">
+            <a:spAutoFit/>
+          </a:bodyPr>
+          <a:lstStyle/>
+          <a:p>
+            <a:pPr algn="l"/>
+            <a:r>
+              <a:rPr lang="zh-CN" altLang="en-US" sz="1200" b="0" dirty="0">
                 <a:solidFill>
                   <a:srgbClr val="9DADB9"/>
                 </a:solidFill>
                 <a:latin typeface="Microsoft YaHei"/>
               </a:rPr>
-              <a:t>恢复</a:t>
-            </a:r>
-            <a:r>
-              <a:rPr sz="1200" b="0" dirty="0">
-                <a:solidFill>
-                  <a:srgbClr val="9DADB9"/>
-                </a:solidFill>
-                <a:latin typeface="Microsoft YaHei"/>
-              </a:rPr>
-              <a:t> GPU </a:t>
-            </a:r>
-            <a:r>
-              <a:rPr sz="1200" b="0" dirty="0" err="1">
-                <a:solidFill>
-                  <a:srgbClr val="9DADB9"/>
-                </a:solidFill>
-                <a:latin typeface="Microsoft YaHei"/>
-              </a:rPr>
-              <a:t>预填充；投机自适应；host</a:t>
-            </a:r>
-            <a:r>
-              <a:rPr sz="1200" b="0" dirty="0">
-                <a:solidFill>
-                  <a:srgbClr val="9DADB9"/>
-                </a:solidFill>
-                <a:latin typeface="Microsoft YaHei"/>
-              </a:rPr>
-              <a:t> </a:t>
-            </a:r>
-            <a:r>
-              <a:rPr sz="1200" b="0" dirty="0" err="1">
-                <a:solidFill>
-                  <a:srgbClr val="9DADB9"/>
-                </a:solidFill>
-                <a:latin typeface="Microsoft YaHei"/>
-              </a:rPr>
-              <a:t>内存去重</a:t>
-            </a:r>
-            <a:endParaRPr lang="en-US" sz="1200" b="0" dirty="0">
+              <a:t>性能优化</a:t>
+            </a:r>
+            <a:endParaRPr lang="en-US" altLang="zh-CN" sz="1200" b="0" dirty="0">
               <a:solidFill>
                 <a:srgbClr val="9DADB9"/>
               </a:solidFill>
@@ -11923,30 +11869,108 @@
         </p:nvSpPr>
         <p:spPr>
           <a:xfrm>
-            <a:off x="8503919" y="3154680"/>
-            <a:ext cx="2743200" cy="594360"/>
-          </a:xfrm>
-          <a:prstGeom prst="rect">
-            <a:avLst/>
-          </a:prstGeom>
-          <a:noFill/>
-        </p:spPr>
-        <p:txBody>
-          <a:bodyPr wrap="square" lIns="36576" tIns="18288" rIns="36576" bIns="18288" anchor="t">
-            <a:spAutoFit/>
-          </a:bodyPr>
-          <a:lstStyle/>
-          <a:p>
-            <a:pPr algn="l"/>
-            <a:r>
-              <a:rPr sz="1200" b="0">
+            <a:off x="8503918" y="3154680"/>
+            <a:ext cx="2880361" cy="590931"/>
+          </a:xfrm>
+          <a:prstGeom prst="rect">
+            <a:avLst/>
+          </a:prstGeom>
+          <a:noFill/>
+        </p:spPr>
+        <p:txBody>
+          <a:bodyPr wrap="square" lIns="36576" tIns="18288" rIns="36576" bIns="18288" anchor="t">
+            <a:spAutoFit/>
+          </a:bodyPr>
+          <a:lstStyle/>
+          <a:p>
+            <a:pPr algn="l"/>
+            <a:r>
+              <a:rPr sz="1200" b="0" dirty="0">
                 <a:solidFill>
                   <a:srgbClr val="9DADB9"/>
                 </a:solidFill>
                 <a:latin typeface="Microsoft YaHei"/>
               </a:rPr>
-              <a:t>CPU 专家池 + GPU 注意力池；跨机扩展</a:t>
-            </a:r>
+              <a:t>CPU </a:t>
+            </a:r>
+            <a:r>
+              <a:rPr sz="1200" b="0" dirty="0" err="1">
+                <a:solidFill>
+                  <a:srgbClr val="9DADB9"/>
+                </a:solidFill>
+                <a:latin typeface="Microsoft YaHei"/>
+              </a:rPr>
+              <a:t>专家池</a:t>
+            </a:r>
+            <a:r>
+              <a:rPr sz="1200" b="0" dirty="0">
+                <a:solidFill>
+                  <a:srgbClr val="9DADB9"/>
+                </a:solidFill>
+                <a:latin typeface="Microsoft YaHei"/>
+              </a:rPr>
+              <a:t> + GPU </a:t>
+            </a:r>
+            <a:r>
+              <a:rPr sz="1200" b="0" dirty="0" err="1">
+                <a:solidFill>
+                  <a:srgbClr val="9DADB9"/>
+                </a:solidFill>
+                <a:latin typeface="Microsoft YaHei"/>
+              </a:rPr>
+              <a:t>注意力池；跨机扩展</a:t>
+            </a:r>
+            <a:endParaRPr lang="en-US" sz="1200" b="0" dirty="0">
+              <a:solidFill>
+                <a:srgbClr val="9DADB9"/>
+              </a:solidFill>
+              <a:latin typeface="Microsoft YaHei"/>
+            </a:endParaRPr>
+          </a:p>
+          <a:p>
+            <a:pPr algn="l"/>
+            <a:endParaRPr lang="en-US" altLang="zh-CN" sz="1200" dirty="0">
+              <a:solidFill>
+                <a:srgbClr val="9DADB9"/>
+              </a:solidFill>
+              <a:latin typeface="Microsoft YaHei"/>
+            </a:endParaRPr>
+          </a:p>
+          <a:p>
+            <a:pPr algn="l"/>
+            <a:r>
+              <a:rPr lang="zh-CN" altLang="en-US" sz="1200" dirty="0">
+                <a:solidFill>
+                  <a:srgbClr val="9DADB9"/>
+                </a:solidFill>
+                <a:latin typeface="Microsoft YaHei"/>
+              </a:rPr>
+              <a:t>国产</a:t>
+            </a:r>
+            <a:r>
+              <a:rPr lang="en-US" altLang="zh-CN" sz="1200" dirty="0">
+                <a:solidFill>
+                  <a:srgbClr val="9DADB9"/>
+                </a:solidFill>
+                <a:latin typeface="Microsoft YaHei"/>
+              </a:rPr>
+              <a:t>GPU</a:t>
+            </a:r>
+            <a:r>
+              <a:rPr lang="zh-CN" altLang="en-US" sz="1200" dirty="0">
+                <a:solidFill>
+                  <a:srgbClr val="9DADB9"/>
+                </a:solidFill>
+                <a:latin typeface="Microsoft YaHei"/>
+              </a:rPr>
+              <a:t>支持</a:t>
+            </a:r>
+            <a:endParaRPr sz="1200" b="0" dirty="0">
+              <a:solidFill>
+                <a:srgbClr val="9DADB9"/>
+              </a:solidFill>
+              <a:latin typeface="Microsoft YaHei"/>
+            </a:endParaRPr>
           </a:p>
         </p:txBody>
       </p:sp>
@@ -12478,27 +12502,7 @@
                 <a:latin typeface="Microsoft YaHei" panose="020B0503020204020204" pitchFamily="34" charset="-122"/>
                 <a:ea typeface="Microsoft YaHei" panose="020B0503020204020204" pitchFamily="34" charset="-122"/>
               </a:rPr>
-              <a:t>Agent</a:t>
-            </a:r>
-            <a:r>
-              <a:rPr lang="zh-CN" altLang="en-US" b="1" dirty="0">
-                <a:solidFill>
-                  <a:srgbClr val="E8EEF2"/>
-                </a:solidFill>
-                <a:latin typeface="Microsoft YaHei" panose="020B0503020204020204" pitchFamily="34" charset="-122"/>
-                <a:ea typeface="Microsoft YaHei" panose="020B0503020204020204" pitchFamily="34" charset="-122"/>
-              </a:rPr>
-              <a:t> </a:t>
-            </a:r>
-            <a:r>
-              <a:rPr lang="en-US" altLang="zh-CN" b="1" dirty="0">
-                <a:solidFill>
-                  <a:srgbClr val="E8EEF2"/>
-                </a:solidFill>
-                <a:latin typeface="Microsoft YaHei" panose="020B0503020204020204" pitchFamily="34" charset="-122"/>
-                <a:ea typeface="Microsoft YaHei" panose="020B0503020204020204" pitchFamily="34" charset="-122"/>
-              </a:rPr>
-              <a:t>Loop</a:t>
+              <a:t>Agentic App</a:t>
             </a:r>
             <a:r>
               <a:rPr lang="zh-CN" altLang="en-US" b="1" dirty="0">
